--- a/output/education/2026-03-29_availability-bias/availability-bias_slides_allstaff.pptx
+++ b/output/education/2026-03-29_availability-bias/availability-bias_slides_allstaff.pptx
@@ -3954,7 +3954,7 @@
         </p:nvSpPr>
         <p:spPr>
           <a:xfrm>
-            <a:off x="731520" y="4114800"/>
+            <a:off x="731520" y="4297680"/>
             <a:ext cx="54864" cy="457200"/>
           </a:xfrm>
           <a:prstGeom prst="rect">
@@ -3997,7 +3997,7 @@
         </p:nvSpPr>
         <p:spPr>
           <a:xfrm>
-            <a:off x="841248" y="4114800"/>
+            <a:off x="841248" y="4297680"/>
             <a:ext cx="7388352" cy="457200"/>
           </a:xfrm>
           <a:prstGeom prst="rect">
@@ -4042,7 +4042,7 @@
         </p:nvSpPr>
         <p:spPr>
           <a:xfrm>
-            <a:off x="960120" y="4187952"/>
+            <a:off x="960120" y="4370832"/>
             <a:ext cx="7132319" cy="310896"/>
           </a:xfrm>
           <a:prstGeom prst="rect">
@@ -6431,7 +6431,7 @@
         </p:nvSpPr>
         <p:spPr>
           <a:xfrm>
-            <a:off x="731520" y="4114800"/>
+            <a:off x="731520" y="4572000"/>
             <a:ext cx="54864" cy="457200"/>
           </a:xfrm>
           <a:prstGeom prst="rect">
@@ -6474,7 +6474,7 @@
         </p:nvSpPr>
         <p:spPr>
           <a:xfrm>
-            <a:off x="841248" y="4114800"/>
+            <a:off x="841248" y="4572000"/>
             <a:ext cx="7388352" cy="457200"/>
           </a:xfrm>
           <a:prstGeom prst="rect">
@@ -6519,7 +6519,7 @@
         </p:nvSpPr>
         <p:spPr>
           <a:xfrm>
-            <a:off x="960120" y="4187952"/>
+            <a:off x="960120" y="4645152"/>
             <a:ext cx="7132319" cy="310896"/>
           </a:xfrm>
           <a:prstGeom prst="rect">
@@ -7695,7 +7695,7 @@
         </p:nvSpPr>
         <p:spPr>
           <a:xfrm>
-            <a:off x="1371600" y="4297680"/>
+            <a:off x="1371600" y="4572000"/>
             <a:ext cx="54864" cy="457200"/>
           </a:xfrm>
           <a:prstGeom prst="rect">
@@ -7738,7 +7738,7 @@
         </p:nvSpPr>
         <p:spPr>
           <a:xfrm>
-            <a:off x="1481328" y="4297680"/>
+            <a:off x="1481328" y="4572000"/>
             <a:ext cx="6291072" cy="457200"/>
           </a:xfrm>
           <a:prstGeom prst="rect">
@@ -7783,7 +7783,7 @@
         </p:nvSpPr>
         <p:spPr>
           <a:xfrm>
-            <a:off x="1600200" y="4370832"/>
+            <a:off x="1600200" y="4645152"/>
             <a:ext cx="6035040" cy="310896"/>
           </a:xfrm>
           <a:prstGeom prst="rect">

--- a/output/education/2026-03-29_availability-bias/availability-bias_slides_allstaff.pptx
+++ b/output/education/2026-03-29_availability-bias/availability-bias_slides_allstaff.pptx
@@ -3136,6 +3136,7 @@
               </a:defRPr>
             </a:pPr>
             <a:r>
+              <a:rPr/>
               <a:t>「思い込み」が判断を狂わせる</a:t>
             </a:r>
           </a:p>
@@ -3172,6 +3173,7 @@
               </a:defRPr>
             </a:pPr>
             <a:r>
+              <a:rPr/>
               <a:t>— 利用可能性バイアスと医療安全</a:t>
             </a:r>
           </a:p>
@@ -3216,7 +3218,9 @@
           <a:bodyPr rtlCol="0" anchor="ctr"/>
           <a:lstStyle/>
           <a:p>
-            <a:pPr algn="ctr"/>
+            <a:pPr algn="ctr">
+              <a:defRPr/>
+            </a:pPr>
           </a:p>
         </p:txBody>
       </p:sp>
@@ -3229,7 +3233,7 @@
         <p:spPr>
           <a:xfrm>
             <a:off x="457200" y="2377440"/>
-            <a:ext cx="8229600" cy="274320"/>
+            <a:ext cx="8229600" cy="304799"/>
           </a:xfrm>
           <a:prstGeom prst="rect">
             <a:avLst/>
@@ -3251,6 +3255,7 @@
               </a:defRPr>
             </a:pPr>
             <a:r>
+              <a:rPr/>
               <a:t>10分 | 全スタッフ向け</a:t>
             </a:r>
           </a:p>
@@ -3295,7 +3300,9 @@
           <a:bodyPr rtlCol="0" anchor="ctr"/>
           <a:lstStyle/>
           <a:p>
-            <a:pPr algn="ctr"/>
+            <a:pPr algn="ctr">
+              <a:defRPr/>
+            </a:pPr>
           </a:p>
         </p:txBody>
       </p:sp>
@@ -3340,7 +3347,9 @@
           <a:bodyPr rtlCol="0" anchor="ctr"/>
           <a:lstStyle/>
           <a:p>
-            <a:pPr algn="ctr"/>
+            <a:pPr algn="ctr">
+              <a:defRPr/>
+            </a:pPr>
           </a:p>
         </p:txBody>
       </p:sp>
@@ -3375,14 +3384,17 @@
               </a:defRPr>
             </a:pPr>
             <a:r>
+              <a:rPr/>
               <a:t>「先週ノロウイルスの患者さんが続いた後、</a:t>
             </a:r>
             <a:br/>
             <a:r>
+              <a:rPr/>
               <a:t>今日も嘔吐の患者さんが来たら...</a:t>
             </a:r>
             <a:br/>
             <a:r>
+              <a:rPr/>
               <a:t>つい“またノロかな”って思いませんか？」</a:t>
             </a:r>
           </a:p>
@@ -3423,7 +3435,7 @@
         <p:spPr>
           <a:xfrm>
             <a:off x="457200" y="274320"/>
-            <a:ext cx="8229600" cy="457200"/>
+            <a:ext cx="8229600" cy="482600"/>
           </a:xfrm>
           <a:prstGeom prst="rect">
             <a:avLst/>
@@ -3445,6 +3457,7 @@
               </a:defRPr>
             </a:pPr>
             <a:r>
+              <a:rPr/>
               <a:t>まとめと振り返り</a:t>
             </a:r>
           </a:p>
@@ -3489,7 +3502,9 @@
           <a:bodyPr rtlCol="0" anchor="ctr"/>
           <a:lstStyle/>
           <a:p>
-            <a:pPr algn="ctr"/>
+            <a:pPr algn="ctr">
+              <a:defRPr/>
+            </a:pPr>
           </a:p>
         </p:txBody>
       </p:sp>
@@ -3532,7 +3547,9 @@
           <a:bodyPr rtlCol="0" anchor="ctr"/>
           <a:lstStyle/>
           <a:p>
-            <a:pPr algn="ctr"/>
+            <a:pPr algn="ctr">
+              <a:defRPr/>
+            </a:pPr>
           </a:p>
         </p:txBody>
       </p:sp>
@@ -3567,6 +3584,7 @@
               </a:defRPr>
             </a:pPr>
             <a:r>
+              <a:rPr/>
               <a:t>1</a:t>
             </a:r>
           </a:p>
@@ -3603,6 +3621,7 @@
               </a:defRPr>
             </a:pPr>
             <a:r>
+              <a:rPr/>
               <a:t>利用可能性バイアス</a:t>
             </a:r>
           </a:p>
@@ -3639,6 +3658,7 @@
               </a:defRPr>
             </a:pPr>
             <a:r>
+              <a:rPr/>
               <a:t>最近の経験が判断を歪めること</a:t>
             </a:r>
           </a:p>
@@ -3683,7 +3703,9 @@
           <a:bodyPr rtlCol="0" anchor="ctr"/>
           <a:lstStyle/>
           <a:p>
-            <a:pPr algn="ctr"/>
+            <a:pPr algn="ctr">
+              <a:defRPr/>
+            </a:pPr>
           </a:p>
         </p:txBody>
       </p:sp>
@@ -3718,6 +3740,7 @@
               </a:defRPr>
             </a:pPr>
             <a:r>
+              <a:rPr/>
               <a:t>2</a:t>
             </a:r>
           </a:p>
@@ -3754,6 +3777,7 @@
               </a:defRPr>
             </a:pPr>
             <a:r>
+              <a:rPr/>
               <a:t>防御策は経験年数ではない</a:t>
             </a:r>
           </a:p>
@@ -3790,6 +3814,7 @@
               </a:defRPr>
             </a:pPr>
             <a:r>
+              <a:rPr/>
               <a:t>振り返りとフィードバックの習慣</a:t>
             </a:r>
           </a:p>
@@ -3834,7 +3859,9 @@
           <a:bodyPr rtlCol="0" anchor="ctr"/>
           <a:lstStyle/>
           <a:p>
-            <a:pPr algn="ctr"/>
+            <a:pPr algn="ctr">
+              <a:defRPr/>
+            </a:pPr>
           </a:p>
         </p:txBody>
       </p:sp>
@@ -3869,6 +3896,7 @@
               </a:defRPr>
             </a:pPr>
             <a:r>
+              <a:rPr/>
               <a:t>3</a:t>
             </a:r>
           </a:p>
@@ -3905,6 +3933,7 @@
               </a:defRPr>
             </a:pPr>
             <a:r>
+              <a:rPr/>
               <a:t>チームの力</a:t>
             </a:r>
           </a:p>
@@ -3941,6 +3970,7 @@
               </a:defRPr>
             </a:pPr>
             <a:r>
+              <a:rPr/>
               <a:t>一人で頑張るのではなく、声をかけ合う文化</a:t>
             </a:r>
           </a:p>
@@ -3985,7 +4015,9 @@
           <a:bodyPr rtlCol="0" anchor="ctr"/>
           <a:lstStyle/>
           <a:p>
-            <a:pPr algn="ctr"/>
+            <a:pPr algn="ctr">
+              <a:defRPr/>
+            </a:pPr>
           </a:p>
         </p:txBody>
       </p:sp>
@@ -4030,7 +4062,9 @@
           <a:bodyPr rtlCol="0" anchor="ctr"/>
           <a:lstStyle/>
           <a:p>
-            <a:pPr algn="ctr"/>
+            <a:pPr algn="ctr">
+              <a:defRPr/>
+            </a:pPr>
           </a:p>
         </p:txBody>
       </p:sp>
@@ -4065,6 +4099,7 @@
               </a:defRPr>
             </a:pPr>
             <a:r>
+              <a:rPr/>
               <a:t>確認: 隣の人に「利用可能性バイアスって何？」を30秒で説明してみましょう</a:t>
             </a:r>
           </a:p>
@@ -4105,7 +4140,7 @@
         <p:spPr>
           <a:xfrm>
             <a:off x="457200" y="274320"/>
-            <a:ext cx="8229600" cy="457200"/>
+            <a:ext cx="8229600" cy="482600"/>
           </a:xfrm>
           <a:prstGeom prst="rect">
             <a:avLst/>
@@ -4127,6 +4162,7 @@
               </a:defRPr>
             </a:pPr>
             <a:r>
+              <a:rPr/>
               <a:t>今日のゴール</a:t>
             </a:r>
           </a:p>
@@ -4171,7 +4207,9 @@
           <a:bodyPr rtlCol="0" anchor="ctr"/>
           <a:lstStyle/>
           <a:p>
-            <a:pPr algn="ctr"/>
+            <a:pPr algn="ctr">
+              <a:defRPr/>
+            </a:pPr>
           </a:p>
         </p:txBody>
       </p:sp>
@@ -4214,7 +4252,9 @@
           <a:bodyPr rtlCol="0" anchor="ctr"/>
           <a:lstStyle/>
           <a:p>
-            <a:pPr algn="ctr"/>
+            <a:pPr algn="ctr">
+              <a:defRPr/>
+            </a:pPr>
           </a:p>
         </p:txBody>
       </p:sp>
@@ -4249,6 +4289,7 @@
               </a:defRPr>
             </a:pPr>
             <a:r>
+              <a:rPr/>
               <a:t>1</a:t>
             </a:r>
           </a:p>
@@ -4285,6 +4326,7 @@
               </a:defRPr>
             </a:pPr>
             <a:r>
+              <a:rPr/>
               <a:t>説明できる</a:t>
             </a:r>
           </a:p>
@@ -4321,10 +4363,12 @@
               </a:defRPr>
             </a:pPr>
             <a:r>
+              <a:rPr/>
               <a:t>「利用可能性バイアス」が何かを</a:t>
             </a:r>
             <a:br/>
             <a:r>
+              <a:rPr/>
               <a:t>ざっくり説明できる</a:t>
             </a:r>
           </a:p>
@@ -4369,7 +4413,9 @@
           <a:bodyPr rtlCol="0" anchor="ctr"/>
           <a:lstStyle/>
           <a:p>
-            <a:pPr algn="ctr"/>
+            <a:pPr algn="ctr">
+              <a:defRPr/>
+            </a:pPr>
           </a:p>
         </p:txBody>
       </p:sp>
@@ -4404,6 +4450,7 @@
               </a:defRPr>
             </a:pPr>
             <a:r>
+              <a:rPr/>
               <a:t>2</a:t>
             </a:r>
           </a:p>
@@ -4440,6 +4487,7 @@
               </a:defRPr>
             </a:pPr>
             <a:r>
+              <a:rPr/>
               <a:t>気づける</a:t>
             </a:r>
           </a:p>
@@ -4476,10 +4524,12 @@
               </a:defRPr>
             </a:pPr>
             <a:r>
+              <a:rPr/>
               <a:t>自分の仕事の中で「思い込み」が</a:t>
             </a:r>
             <a:br/>
             <a:r>
+              <a:rPr/>
               <a:t>起きやすい場面を1つ挙げられる</a:t>
             </a:r>
           </a:p>
@@ -4524,7 +4574,9 @@
           <a:bodyPr rtlCol="0" anchor="ctr"/>
           <a:lstStyle/>
           <a:p>
-            <a:pPr algn="ctr"/>
+            <a:pPr algn="ctr">
+              <a:defRPr/>
+            </a:pPr>
           </a:p>
         </p:txBody>
       </p:sp>
@@ -4559,6 +4611,7 @@
               </a:defRPr>
             </a:pPr>
             <a:r>
+              <a:rPr/>
               <a:t>3</a:t>
             </a:r>
           </a:p>
@@ -4595,6 +4648,7 @@
               </a:defRPr>
             </a:pPr>
             <a:r>
+              <a:rPr/>
               <a:t>やってみる</a:t>
             </a:r>
           </a:p>
@@ -4631,10 +4685,12 @@
               </a:defRPr>
             </a:pPr>
             <a:r>
+              <a:rPr/>
               <a:t>明日から使える「思い込み防止」の</a:t>
             </a:r>
             <a:br/>
             <a:r>
+              <a:rPr/>
               <a:t>コツを1つ実践できる</a:t>
             </a:r>
           </a:p>
@@ -4697,6 +4753,7 @@
               </a:defRPr>
             </a:pPr>
             <a:r>
+              <a:rPr/>
               <a:t>私たちの脳は「ショートカット」が大好き</a:t>
             </a:r>
           </a:p>
@@ -4741,7 +4798,9 @@
           <a:bodyPr rtlCol="0" anchor="ctr"/>
           <a:lstStyle/>
           <a:p>
-            <a:pPr algn="ctr"/>
+            <a:pPr algn="ctr">
+              <a:defRPr/>
+            </a:pPr>
           </a:p>
         </p:txBody>
       </p:sp>
@@ -4786,7 +4845,9 @@
           <a:bodyPr rtlCol="0" anchor="ctr"/>
           <a:lstStyle/>
           <a:p>
-            <a:pPr algn="ctr"/>
+            <a:pPr algn="ctr">
+              <a:defRPr/>
+            </a:pPr>
           </a:p>
         </p:txBody>
       </p:sp>
@@ -4821,6 +4882,7 @@
               </a:defRPr>
             </a:pPr>
             <a:r>
+              <a:rPr/>
               <a:t>速い脳（直感モード）</a:t>
             </a:r>
           </a:p>
@@ -4857,10 +4919,12 @@
               </a:defRPr>
             </a:pPr>
             <a:r>
+              <a:rPr/>
               <a:t>パッと判断する</a:t>
             </a:r>
             <a:br/>
             <a:r>
+              <a:rPr/>
               <a:t>普段はこちらが大活躍</a:t>
             </a:r>
           </a:p>
@@ -4907,7 +4971,9 @@
           <a:bodyPr rtlCol="0" anchor="ctr"/>
           <a:lstStyle/>
           <a:p>
-            <a:pPr algn="ctr"/>
+            <a:pPr algn="ctr">
+              <a:defRPr/>
+            </a:pPr>
           </a:p>
         </p:txBody>
       </p:sp>
@@ -4942,6 +5008,7 @@
               </a:defRPr>
             </a:pPr>
             <a:r>
+              <a:rPr/>
               <a:t>遅い脳（じっくりモード）</a:t>
             </a:r>
           </a:p>
@@ -4978,10 +5045,12 @@
               </a:defRPr>
             </a:pPr>
             <a:r>
+              <a:rPr/>
               <a:t>よく考えて判断する</a:t>
             </a:r>
             <a:br/>
             <a:r>
+              <a:rPr/>
               <a:t>時間とエネルギーが必要</a:t>
             </a:r>
           </a:p>
@@ -5018,6 +5087,7 @@
               </a:defRPr>
             </a:pPr>
             <a:r>
+              <a:rPr/>
               <a:t>忙しい医療現場では「速い脳」に頼りがち</a:t>
             </a:r>
           </a:p>
@@ -5054,6 +5124,7 @@
               </a:defRPr>
             </a:pPr>
             <a:r>
+              <a:rPr/>
               <a:t>ただし「速い脳」には思い込みのクセ（＝認知バイアス）がある</a:t>
             </a:r>
           </a:p>
@@ -5094,7 +5165,7 @@
         <p:spPr>
           <a:xfrm>
             <a:off x="457200" y="274320"/>
-            <a:ext cx="8229600" cy="457200"/>
+            <a:ext cx="8229600" cy="482600"/>
           </a:xfrm>
           <a:prstGeom prst="rect">
             <a:avLst/>
@@ -5116,6 +5187,7 @@
               </a:defRPr>
             </a:pPr>
             <a:r>
+              <a:rPr/>
               <a:t>利用可能性バイアスってなに？</a:t>
             </a:r>
           </a:p>
@@ -5160,7 +5232,9 @@
           <a:bodyPr rtlCol="0" anchor="ctr"/>
           <a:lstStyle/>
           <a:p>
-            <a:pPr algn="ctr"/>
+            <a:pPr algn="ctr">
+              <a:defRPr/>
+            </a:pPr>
           </a:p>
         </p:txBody>
       </p:sp>
@@ -5203,7 +5277,9 @@
           <a:bodyPr rtlCol="0" anchor="ctr"/>
           <a:lstStyle/>
           <a:p>
-            <a:pPr algn="ctr"/>
+            <a:pPr algn="ctr">
+              <a:defRPr/>
+            </a:pPr>
           </a:p>
         </p:txBody>
       </p:sp>
@@ -5248,7 +5324,9 @@
           <a:bodyPr rtlCol="0" anchor="ctr"/>
           <a:lstStyle/>
           <a:p>
-            <a:pPr algn="ctr"/>
+            <a:pPr algn="ctr">
+              <a:defRPr/>
+            </a:pPr>
           </a:p>
         </p:txBody>
       </p:sp>
@@ -5283,10 +5361,12 @@
               </a:defRPr>
             </a:pPr>
             <a:r>
+              <a:rPr/>
               <a:t>「最近見たもの・印象に残ったもの」を、</a:t>
             </a:r>
             <a:br/>
             <a:r>
+              <a:rPr/>
               <a:t>実際よりも多いと思い込むこと</a:t>
             </a:r>
           </a:p>
@@ -5301,7 +5381,7 @@
         <p:spPr>
           <a:xfrm>
             <a:off x="731520" y="2103120"/>
-            <a:ext cx="3657600" cy="274320"/>
+            <a:ext cx="3657600" cy="340360"/>
           </a:xfrm>
           <a:prstGeom prst="rect">
             <a:avLst/>
@@ -5323,6 +5403,7 @@
               </a:defRPr>
             </a:pPr>
             <a:r>
+              <a:rPr/>
               <a:t>日常の例:</a:t>
             </a:r>
           </a:p>
@@ -5359,10 +5440,12 @@
               </a:defRPr>
             </a:pPr>
             <a:r>
+              <a:rPr/>
               <a:t>飛行機事故のニュース → 飛行機が怖くなる</a:t>
             </a:r>
             <a:br/>
             <a:r>
+              <a:rPr/>
               <a:t>食中毒の報道 → 食品の鮮度が気になる</a:t>
             </a:r>
           </a:p>
@@ -5377,7 +5460,7 @@
         <p:spPr>
           <a:xfrm>
             <a:off x="4754880" y="2103120"/>
-            <a:ext cx="4114800" cy="274320"/>
+            <a:ext cx="4114800" cy="340360"/>
           </a:xfrm>
           <a:prstGeom prst="rect">
             <a:avLst/>
@@ -5399,6 +5482,7 @@
               </a:defRPr>
             </a:pPr>
             <a:r>
+              <a:rPr/>
               <a:t>医療現場の例:</a:t>
             </a:r>
           </a:p>
@@ -5435,10 +5519,12 @@
               </a:defRPr>
             </a:pPr>
             <a:r>
+              <a:rPr/>
               <a:t>インフルエンザ5人連続 → 似た症状は全部インフル</a:t>
             </a:r>
             <a:br/>
             <a:r>
+              <a:rPr/>
               <a:t>前回の夜勤で転倒事故 → 転倒にだけ注意が向く</a:t>
             </a:r>
           </a:p>
@@ -5479,7 +5565,7 @@
         <p:spPr>
           <a:xfrm>
             <a:off x="457200" y="274320"/>
-            <a:ext cx="8229600" cy="457200"/>
+            <a:ext cx="8229600" cy="482600"/>
           </a:xfrm>
           <a:prstGeom prst="rect">
             <a:avLst/>
@@ -5501,6 +5587,7 @@
               </a:defRPr>
             </a:pPr>
             <a:r>
+              <a:rPr/>
               <a:t>最新研究が示した衝撃の結果</a:t>
             </a:r>
           </a:p>
@@ -5545,7 +5632,9 @@
           <a:bodyPr rtlCol="0" anchor="ctr"/>
           <a:lstStyle/>
           <a:p>
-            <a:pPr algn="ctr"/>
+            <a:pPr algn="ctr">
+              <a:defRPr/>
+            </a:pPr>
           </a:p>
         </p:txBody>
       </p:sp>
@@ -5558,7 +5647,7 @@
         <p:spPr>
           <a:xfrm>
             <a:off x="457200" y="1005840"/>
-            <a:ext cx="8229600" cy="274320"/>
+            <a:ext cx="8229600" cy="304799"/>
           </a:xfrm>
           <a:prstGeom prst="rect">
             <a:avLst/>
@@ -5580,6 +5669,7 @@
               </a:defRPr>
             </a:pPr>
             <a:r>
+              <a:rPr/>
               <a:t>BMJ Quality &amp; Safety (2026年2月) | 対象: 1015名の医師</a:t>
             </a:r>
           </a:p>
@@ -5876,7 +5966,9 @@
           <a:bodyPr rtlCol="0" anchor="ctr"/>
           <a:lstStyle/>
           <a:p>
-            <a:pPr algn="ctr"/>
+            <a:pPr algn="ctr">
+              <a:defRPr/>
+            </a:pPr>
           </a:p>
         </p:txBody>
       </p:sp>
@@ -5921,7 +6013,9 @@
           <a:bodyPr rtlCol="0" anchor="ctr"/>
           <a:lstStyle/>
           <a:p>
-            <a:pPr algn="ctr"/>
+            <a:pPr algn="ctr">
+              <a:defRPr/>
+            </a:pPr>
           </a:p>
         </p:txBody>
       </p:sp>
@@ -5934,7 +6028,7 @@
         <p:spPr>
           <a:xfrm>
             <a:off x="1143000" y="4187952"/>
-            <a:ext cx="6949440" cy="310896"/>
+            <a:ext cx="6949440" cy="340360"/>
           </a:xfrm>
           <a:prstGeom prst="rect">
             <a:avLst/>
@@ -5956,6 +6050,7 @@
               </a:defRPr>
             </a:pPr>
             <a:r>
+              <a:rPr/>
               <a:t>ポイント: 「たくさん経験していれば大丈夫」ではない！</a:t>
             </a:r>
           </a:p>
@@ -6018,6 +6113,7 @@
               </a:defRPr>
             </a:pPr>
             <a:r>
+              <a:rPr/>
               <a:t>医師だけの話？ — 全職種に起きる「思い込み」</a:t>
             </a:r>
           </a:p>
@@ -6062,7 +6158,9 @@
           <a:bodyPr rtlCol="0" anchor="ctr"/>
           <a:lstStyle/>
           <a:p>
-            <a:pPr algn="ctr"/>
+            <a:pPr algn="ctr">
+              <a:defRPr/>
+            </a:pPr>
           </a:p>
         </p:txBody>
       </p:sp>
@@ -6105,7 +6203,9 @@
           <a:bodyPr rtlCol="0" anchor="ctr"/>
           <a:lstStyle/>
           <a:p>
-            <a:pPr algn="ctr"/>
+            <a:pPr algn="ctr">
+              <a:defRPr/>
+            </a:pPr>
           </a:p>
         </p:txBody>
       </p:sp>
@@ -6140,6 +6240,7 @@
               </a:defRPr>
             </a:pPr>
             <a:r>
+              <a:rPr/>
               <a:t>看護師</a:t>
             </a:r>
           </a:p>
@@ -6176,10 +6277,12 @@
               </a:defRPr>
             </a:pPr>
             <a:r>
+              <a:rPr/>
               <a:t>転倒が続いた → 身体拘束の判断に影響</a:t>
             </a:r>
             <a:br/>
             <a:r>
+              <a:rPr/>
               <a:t>急変があった → バイタル変動を過剰に心配</a:t>
             </a:r>
           </a:p>
@@ -6224,7 +6327,9 @@
           <a:bodyPr rtlCol="0" anchor="ctr"/>
           <a:lstStyle/>
           <a:p>
-            <a:pPr algn="ctr"/>
+            <a:pPr algn="ctr">
+              <a:defRPr/>
+            </a:pPr>
           </a:p>
         </p:txBody>
       </p:sp>
@@ -6259,6 +6364,7 @@
               </a:defRPr>
             </a:pPr>
             <a:r>
+              <a:rPr/>
               <a:t>薬剤師</a:t>
             </a:r>
           </a:p>
@@ -6295,10 +6401,12 @@
               </a:defRPr>
             </a:pPr>
             <a:r>
+              <a:rPr/>
               <a:t>処方ミスを発見した薬 → その薬ばかりに注意</a:t>
             </a:r>
             <a:br/>
             <a:r>
+              <a:rPr/>
               <a:t>他の薬のチェックが甘くなる</a:t>
             </a:r>
           </a:p>
@@ -6343,7 +6451,9 @@
           <a:bodyPr rtlCol="0" anchor="ctr"/>
           <a:lstStyle/>
           <a:p>
-            <a:pPr algn="ctr"/>
+            <a:pPr algn="ctr">
+              <a:defRPr/>
+            </a:pPr>
           </a:p>
         </p:txBody>
       </p:sp>
@@ -6378,6 +6488,7 @@
               </a:defRPr>
             </a:pPr>
             <a:r>
+              <a:rPr/>
               <a:t>事務・管理</a:t>
             </a:r>
           </a:p>
@@ -6414,10 +6525,12 @@
               </a:defRPr>
             </a:pPr>
             <a:r>
+              <a:rPr/>
               <a:t>クレームが多かった部署 → その部署の問題</a:t>
             </a:r>
             <a:br/>
             <a:r>
+              <a:rPr/>
               <a:t>ばかりが目につく</a:t>
             </a:r>
           </a:p>
@@ -6462,7 +6575,9 @@
           <a:bodyPr rtlCol="0" anchor="ctr"/>
           <a:lstStyle/>
           <a:p>
-            <a:pPr algn="ctr"/>
+            <a:pPr algn="ctr">
+              <a:defRPr/>
+            </a:pPr>
           </a:p>
         </p:txBody>
       </p:sp>
@@ -6507,7 +6622,9 @@
           <a:bodyPr rtlCol="0" anchor="ctr"/>
           <a:lstStyle/>
           <a:p>
-            <a:pPr algn="ctr"/>
+            <a:pPr algn="ctr">
+              <a:defRPr/>
+            </a:pPr>
           </a:p>
         </p:txBody>
       </p:sp>
@@ -6542,6 +6659,7 @@
               </a:defRPr>
             </a:pPr>
             <a:r>
+              <a:rPr/>
               <a:t>思い込みは全職種に起きます。だからこそチームで対策する意味がある</a:t>
             </a:r>
           </a:p>
@@ -6582,7 +6700,7 @@
         <p:spPr>
           <a:xfrm>
             <a:off x="457200" y="274320"/>
-            <a:ext cx="8229600" cy="457200"/>
+            <a:ext cx="8229600" cy="482600"/>
           </a:xfrm>
           <a:prstGeom prst="rect">
             <a:avLst/>
@@ -6604,6 +6722,7 @@
               </a:defRPr>
             </a:pPr>
             <a:r>
+              <a:rPr/>
               <a:t>グループトーク（3分間）</a:t>
             </a:r>
           </a:p>
@@ -6648,7 +6767,9 @@
           <a:bodyPr rtlCol="0" anchor="ctr"/>
           <a:lstStyle/>
           <a:p>
-            <a:pPr algn="ctr"/>
+            <a:pPr algn="ctr">
+              <a:defRPr/>
+            </a:pPr>
           </a:p>
         </p:txBody>
       </p:sp>
@@ -6691,7 +6812,9 @@
           <a:bodyPr rtlCol="0" anchor="ctr"/>
           <a:lstStyle/>
           <a:p>
-            <a:pPr algn="ctr"/>
+            <a:pPr algn="ctr">
+              <a:defRPr/>
+            </a:pPr>
           </a:p>
         </p:txBody>
       </p:sp>
@@ -6736,7 +6859,9 @@
           <a:bodyPr rtlCol="0" anchor="ctr"/>
           <a:lstStyle/>
           <a:p>
-            <a:pPr algn="ctr"/>
+            <a:pPr algn="ctr">
+              <a:defRPr/>
+            </a:pPr>
           </a:p>
         </p:txBody>
       </p:sp>
@@ -6771,19 +6896,23 @@
               </a:defRPr>
             </a:pPr>
             <a:r>
+              <a:rPr/>
               <a:t>近くの人と話してみましょう:</a:t>
             </a:r>
             <a:br/>
             <a:br/>
             <a:r>
+              <a:rPr/>
               <a:t>「最近、“前と同じだろう” と思って</a:t>
             </a:r>
             <a:br/>
             <a:r>
+              <a:rPr/>
               <a:t>判断したことはありますか？</a:t>
             </a:r>
             <a:br/>
             <a:r>
+              <a:rPr/>
               <a:t>その判断は正しかったですか？」</a:t>
             </a:r>
           </a:p>
@@ -6798,7 +6927,7 @@
         <p:spPr>
           <a:xfrm>
             <a:off x="914400" y="3657600"/>
-            <a:ext cx="7315200" cy="274320"/>
+            <a:ext cx="7315200" cy="304799"/>
           </a:xfrm>
           <a:prstGeom prst="rect">
             <a:avLst/>
@@ -6820,6 +6949,7 @@
               </a:defRPr>
             </a:pPr>
             <a:r>
+              <a:rPr/>
               <a:t>2-3人グループ / 正解・不正解は気にせず「あるある」を共有しましょう</a:t>
             </a:r>
           </a:p>
@@ -6860,7 +6990,7 @@
         <p:spPr>
           <a:xfrm>
             <a:off x="457200" y="274320"/>
-            <a:ext cx="8229600" cy="457200"/>
+            <a:ext cx="8229600" cy="482600"/>
           </a:xfrm>
           <a:prstGeom prst="rect">
             <a:avLst/>
@@ -6882,6 +7012,7 @@
               </a:defRPr>
             </a:pPr>
             <a:r>
+              <a:rPr/>
               <a:t>共有タイム</a:t>
             </a:r>
           </a:p>
@@ -6926,7 +7057,9 @@
           <a:bodyPr rtlCol="0" anchor="ctr"/>
           <a:lstStyle/>
           <a:p>
-            <a:pPr algn="ctr"/>
+            <a:pPr algn="ctr">
+              <a:defRPr/>
+            </a:pPr>
           </a:p>
         </p:txBody>
       </p:sp>
@@ -6939,7 +7072,7 @@
         <p:spPr>
           <a:xfrm>
             <a:off x="457200" y="1005840"/>
-            <a:ext cx="8229600" cy="274320"/>
+            <a:ext cx="8229600" cy="340360"/>
           </a:xfrm>
           <a:prstGeom prst="rect">
             <a:avLst/>
@@ -6961,6 +7094,7 @@
               </a:defRPr>
             </a:pPr>
             <a:r>
+              <a:rPr/>
               <a:t>グループで出た「あるある」を1-2グループから共有</a:t>
             </a:r>
           </a:p>
@@ -7005,7 +7139,9 @@
           <a:bodyPr rtlCol="0" anchor="ctr"/>
           <a:lstStyle/>
           <a:p>
-            <a:pPr algn="ctr"/>
+            <a:pPr algn="ctr">
+              <a:defRPr/>
+            </a:pPr>
           </a:p>
         </p:txBody>
       </p:sp>
@@ -7018,7 +7154,7 @@
         <p:spPr>
           <a:xfrm>
             <a:off x="914400" y="1737360"/>
-            <a:ext cx="7315200" cy="274320"/>
+            <a:ext cx="7315200" cy="340360"/>
           </a:xfrm>
           <a:prstGeom prst="rect">
             <a:avLst/>
@@ -7040,6 +7176,7 @@
               </a:defRPr>
             </a:pPr>
             <a:r>
+              <a:rPr/>
               <a:t>ファシリテーターからのまとめ:</a:t>
             </a:r>
           </a:p>
@@ -7076,6 +7213,7 @@
               </a:defRPr>
             </a:pPr>
             <a:r>
+              <a:rPr/>
               <a:t>「思い込み」は能力の問題ではなく、脳の仕組みの問題</a:t>
             </a:r>
           </a:p>
@@ -7112,6 +7250,7 @@
               </a:defRPr>
             </a:pPr>
             <a:r>
+              <a:rPr/>
               <a:t>だから「気をつけよう」だけでは防げない → 仕組みが必要</a:t>
             </a:r>
           </a:p>
@@ -7152,7 +7291,7 @@
         <p:spPr>
           <a:xfrm>
             <a:off x="457200" y="274320"/>
-            <a:ext cx="8229600" cy="457200"/>
+            <a:ext cx="8229600" cy="482600"/>
           </a:xfrm>
           <a:prstGeom prst="rect">
             <a:avLst/>
@@ -7174,6 +7313,7 @@
               </a:defRPr>
             </a:pPr>
             <a:r>
+              <a:rPr/>
               <a:t>明日から使える3つのコツ</a:t>
             </a:r>
           </a:p>
@@ -7218,7 +7358,9 @@
           <a:bodyPr rtlCol="0" anchor="ctr"/>
           <a:lstStyle/>
           <a:p>
-            <a:pPr algn="ctr"/>
+            <a:pPr algn="ctr">
+              <a:defRPr/>
+            </a:pPr>
           </a:p>
         </p:txBody>
       </p:sp>
@@ -7261,7 +7403,9 @@
           <a:bodyPr rtlCol="0" anchor="ctr"/>
           <a:lstStyle/>
           <a:p>
-            <a:pPr algn="ctr"/>
+            <a:pPr algn="ctr">
+              <a:defRPr/>
+            </a:pPr>
           </a:p>
         </p:txBody>
       </p:sp>
@@ -7274,7 +7418,7 @@
         <p:spPr>
           <a:xfrm>
             <a:off x="457200" y="1234439"/>
-            <a:ext cx="2011680" cy="365760"/>
+            <a:ext cx="2011680" cy="375920"/>
           </a:xfrm>
           <a:prstGeom prst="rect">
             <a:avLst/>
@@ -7296,6 +7440,7 @@
               </a:defRPr>
             </a:pPr>
             <a:r>
+              <a:rPr/>
               <a:t>立ち止まる</a:t>
             </a:r>
           </a:p>
@@ -7310,7 +7455,7 @@
         <p:spPr>
           <a:xfrm>
             <a:off x="457200" y="1691640"/>
-            <a:ext cx="2011680" cy="274320"/>
+            <a:ext cx="2011680" cy="304799"/>
           </a:xfrm>
           <a:prstGeom prst="rect">
             <a:avLst/>
@@ -7332,6 +7477,7 @@
               </a:defRPr>
             </a:pPr>
             <a:r>
+              <a:rPr/>
               <a:t>5秒</a:t>
             </a:r>
           </a:p>
@@ -7368,10 +7514,12 @@
               </a:defRPr>
             </a:pPr>
             <a:r>
+              <a:rPr/>
               <a:t>判断する前に「本当に？</a:t>
             </a:r>
             <a:br/>
             <a:r>
+              <a:rPr/>
               <a:t>前回と同じとは限らないよね」と自問</a:t>
             </a:r>
           </a:p>
@@ -7416,7 +7564,9 @@
           <a:bodyPr rtlCol="0" anchor="ctr"/>
           <a:lstStyle/>
           <a:p>
-            <a:pPr algn="ctr"/>
+            <a:pPr algn="ctr">
+              <a:defRPr/>
+            </a:pPr>
           </a:p>
         </p:txBody>
       </p:sp>
@@ -7429,7 +7579,7 @@
         <p:spPr>
           <a:xfrm>
             <a:off x="457200" y="2423160"/>
-            <a:ext cx="2011680" cy="365760"/>
+            <a:ext cx="2011680" cy="375920"/>
           </a:xfrm>
           <a:prstGeom prst="rect">
             <a:avLst/>
@@ -7451,6 +7601,7 @@
               </a:defRPr>
             </a:pPr>
             <a:r>
+              <a:rPr/>
               <a:t>声に出す</a:t>
             </a:r>
           </a:p>
@@ -7465,7 +7616,7 @@
         <p:spPr>
           <a:xfrm>
             <a:off x="457200" y="2880360"/>
-            <a:ext cx="2011680" cy="274320"/>
+            <a:ext cx="2011680" cy="304799"/>
           </a:xfrm>
           <a:prstGeom prst="rect">
             <a:avLst/>
@@ -7487,6 +7638,7 @@
               </a:defRPr>
             </a:pPr>
             <a:r>
+              <a:rPr/>
               <a:t>30秒</a:t>
             </a:r>
           </a:p>
@@ -7523,10 +7675,12 @@
               </a:defRPr>
             </a:pPr>
             <a:r>
+              <a:rPr/>
               <a:t>「私は○○だと思う。他の可能性は？」</a:t>
             </a:r>
             <a:br/>
             <a:r>
+              <a:rPr/>
               <a:t>と同僚に一言聞く</a:t>
             </a:r>
           </a:p>
@@ -7571,7 +7725,9 @@
           <a:bodyPr rtlCol="0" anchor="ctr"/>
           <a:lstStyle/>
           <a:p>
-            <a:pPr algn="ctr"/>
+            <a:pPr algn="ctr">
+              <a:defRPr/>
+            </a:pPr>
           </a:p>
         </p:txBody>
       </p:sp>
@@ -7584,7 +7740,7 @@
         <p:spPr>
           <a:xfrm>
             <a:off x="457200" y="3611879"/>
-            <a:ext cx="2011680" cy="365760"/>
+            <a:ext cx="2011680" cy="375920"/>
           </a:xfrm>
           <a:prstGeom prst="rect">
             <a:avLst/>
@@ -7606,6 +7762,7 @@
               </a:defRPr>
             </a:pPr>
             <a:r>
+              <a:rPr/>
               <a:t>書き出す</a:t>
             </a:r>
           </a:p>
@@ -7620,7 +7777,7 @@
         <p:spPr>
           <a:xfrm>
             <a:off x="457200" y="4069080"/>
-            <a:ext cx="2011680" cy="274320"/>
+            <a:ext cx="2011680" cy="304799"/>
           </a:xfrm>
           <a:prstGeom prst="rect">
             <a:avLst/>
@@ -7642,6 +7799,7 @@
               </a:defRPr>
             </a:pPr>
             <a:r>
+              <a:rPr/>
               <a:t>1分</a:t>
             </a:r>
           </a:p>
@@ -7678,10 +7836,12 @@
               </a:defRPr>
             </a:pPr>
             <a:r>
+              <a:rPr/>
               <a:t>判断に迷った場面をメモしておき、</a:t>
             </a:r>
             <a:br/>
             <a:r>
+              <a:rPr/>
               <a:t>後で振り返る</a:t>
             </a:r>
           </a:p>
@@ -7726,7 +7886,9 @@
           <a:bodyPr rtlCol="0" anchor="ctr"/>
           <a:lstStyle/>
           <a:p>
-            <a:pPr algn="ctr"/>
+            <a:pPr algn="ctr">
+              <a:defRPr/>
+            </a:pPr>
           </a:p>
         </p:txBody>
       </p:sp>
@@ -7771,7 +7933,9 @@
           <a:bodyPr rtlCol="0" anchor="ctr"/>
           <a:lstStyle/>
           <a:p>
-            <a:pPr algn="ctr"/>
+            <a:pPr algn="ctr">
+              <a:defRPr/>
+            </a:pPr>
           </a:p>
         </p:txBody>
       </p:sp>
@@ -7784,7 +7948,7 @@
         <p:spPr>
           <a:xfrm>
             <a:off x="1600200" y="4645152"/>
-            <a:ext cx="6035040" cy="310896"/>
+            <a:ext cx="6035040" cy="340360"/>
           </a:xfrm>
           <a:prstGeom prst="rect">
             <a:avLst/>
@@ -7806,6 +7970,7 @@
               </a:defRPr>
             </a:pPr>
             <a:r>
+              <a:rPr/>
               <a:t>今週1つだけ試してみましょう。どれを選びますか？</a:t>
             </a:r>
           </a:p>
